--- a/料金比較表_v1.pptx
+++ b/料金比較表_v1.pptx
@@ -941,7 +941,7 @@
                 <a:ea typeface="Calibri" pitchFamily="34" charset="-122"/>
                 <a:cs typeface="Calibri" pitchFamily="34" charset="-120"/>
               </a:rPr>
-              <a:t>料金比較表　3点セット（冷蔵庫・洗濯機・電子レンジ）</a:t>
+              <a:t>料金比較表　3点セット（冷蔵庫80L・洗濯機4.2kg・電子レンジ）</a:t>
             </a:r>
             <a:endParaRPr lang="en-US" sz="1600" dirty="0"/>
           </a:p>
@@ -1922,7 +1922,7 @@
                 <a:ea typeface="Calibri" pitchFamily="34" charset="-122"/>
                 <a:cs typeface="Calibri" pitchFamily="34" charset="-120"/>
               </a:rPr>
-              <a:t>3,200〜4,500 円</a:t>
+              <a:t>2,875 円</a:t>
             </a:r>
             <a:endParaRPr lang="en-US" sz="1050" dirty="0"/>
           </a:p>
@@ -1961,7 +1961,7 @@
                 <a:ea typeface="Calibri" pitchFamily="34" charset="-122"/>
                 <a:cs typeface="Calibri" pitchFamily="34" charset="-120"/>
               </a:rPr>
-              <a:t>（概算）</a:t>
+              <a:t>（新品・2年／4年1,604円）</a:t>
             </a:r>
             <a:endParaRPr lang="en-US" sz="750" dirty="0"/>
           </a:p>
@@ -1994,13 +1994,13 @@
             <a:r>
               <a:rPr lang="en-US" sz="1050" dirty="0">
                 <a:solidFill>
-                  <a:srgbClr val="333333"/>
-                </a:solidFill>
-                <a:latin typeface="Calibri" pitchFamily="34" charset="0"/>
-                <a:ea typeface="Calibri" pitchFamily="34" charset="-122"/>
-                <a:cs typeface="Calibri" pitchFamily="34" charset="-120"/>
-              </a:rPr>
-              <a:t>2,900〜4,200 円</a:t>
+                  <a:srgbClr val="999999"/>
+                </a:solidFill>
+                <a:latin typeface="Calibri" pitchFamily="34" charset="0"/>
+                <a:ea typeface="Calibri" pitchFamily="34" charset="-122"/>
+                <a:cs typeface="Calibri" pitchFamily="34" charset="-120"/>
+              </a:rPr>
+              <a:t>要確認</a:t>
             </a:r>
             <a:endParaRPr lang="en-US" sz="1050" dirty="0"/>
           </a:p>
@@ -2039,7 +2039,7 @@
                 <a:ea typeface="Calibri" pitchFamily="34" charset="-122"/>
                 <a:cs typeface="Calibri" pitchFamily="34" charset="-120"/>
               </a:rPr>
-              <a:t>（概算）</a:t>
+              <a:t>（公式HP参照）</a:t>
             </a:r>
             <a:endParaRPr lang="en-US" sz="750" dirty="0"/>
           </a:p>
@@ -2398,8 +2398,8 @@
         </p:nvSpPr>
         <p:spPr>
           <a:xfrm>
-            <a:off x="4389120" y="1691640"/>
-            <a:ext cx="1389888" cy="521208"/>
+            <a:off x="4389120" y="1728216"/>
+            <a:ext cx="1389888" cy="310896"/>
           </a:xfrm>
           <a:prstGeom prst="rect">
             <a:avLst/>
@@ -2423,7 +2423,7 @@
                 <a:ea typeface="Calibri" pitchFamily="34" charset="-122"/>
                 <a:cs typeface="Calibri" pitchFamily="34" charset="-120"/>
               </a:rPr>
-              <a:t>76,800〜108,000 円</a:t>
+              <a:t>69,000 円</a:t>
             </a:r>
             <a:endParaRPr lang="en-US" sz="1050" dirty="0"/>
           </a:p>
@@ -2432,6 +2432,45 @@
       <p:sp>
         <p:nvSpPr>
           <p:cNvPr id="47" name="Text 45"/>
+          <p:cNvSpPr/>
+          <p:nvPr/>
+        </p:nvSpPr>
+        <p:spPr>
+          <a:xfrm>
+            <a:off x="4389120" y="2020824"/>
+            <a:ext cx="1389888" cy="164592"/>
+          </a:xfrm>
+          <a:prstGeom prst="rect">
+            <a:avLst/>
+          </a:prstGeom>
+          <a:noFill/>
+          <a:ln/>
+        </p:spPr>
+        <p:txBody>
+          <a:bodyPr wrap="square" rtlCol="0" anchor="ctr"/>
+          <a:lstStyle/>
+          <a:p>
+            <a:pPr algn="ctr" indent="0" marL="0">
+              <a:buNone/>
+            </a:pPr>
+            <a:r>
+              <a:rPr lang="en-US" sz="750" dirty="0">
+                <a:solidFill>
+                  <a:srgbClr val="999999"/>
+                </a:solidFill>
+                <a:latin typeface="Calibri" pitchFamily="34" charset="0"/>
+                <a:ea typeface="Calibri" pitchFamily="34" charset="-122"/>
+                <a:cs typeface="Calibri" pitchFamily="34" charset="-120"/>
+              </a:rPr>
+              <a:t>（新品・2年）※4年77,000円</a:t>
+            </a:r>
+            <a:endParaRPr lang="en-US" sz="750" dirty="0"/>
+          </a:p>
+        </p:txBody>
+      </p:sp>
+      <p:sp>
+        <p:nvSpPr>
+          <p:cNvPr id="48" name="Text 46"/>
           <p:cNvSpPr/>
           <p:nvPr/>
         </p:nvSpPr>
@@ -2456,13 +2495,13 @@
             <a:r>
               <a:rPr lang="en-US" sz="1050" dirty="0">
                 <a:solidFill>
-                  <a:srgbClr val="333333"/>
-                </a:solidFill>
-                <a:latin typeface="Calibri" pitchFamily="34" charset="0"/>
-                <a:ea typeface="Calibri" pitchFamily="34" charset="-122"/>
-                <a:cs typeface="Calibri" pitchFamily="34" charset="-120"/>
-              </a:rPr>
-              <a:t>69,600〜100,800 円</a:t>
+                  <a:srgbClr val="999999"/>
+                </a:solidFill>
+                <a:latin typeface="Calibri" pitchFamily="34" charset="0"/>
+                <a:ea typeface="Calibri" pitchFamily="34" charset="-122"/>
+                <a:cs typeface="Calibri" pitchFamily="34" charset="-120"/>
+              </a:rPr>
+              <a:t>要確認</a:t>
             </a:r>
             <a:endParaRPr lang="en-US" sz="1050" dirty="0"/>
           </a:p>
@@ -2470,7 +2509,7 @@
       </p:sp>
       <p:sp>
         <p:nvSpPr>
-          <p:cNvPr id="48" name="Text 46"/>
+          <p:cNvPr id="49" name="Text 47"/>
           <p:cNvSpPr/>
           <p:nvPr/>
         </p:nvSpPr>
@@ -2509,7 +2548,7 @@
       </p:sp>
       <p:sp>
         <p:nvSpPr>
-          <p:cNvPr id="49" name="Text 47"/>
+          <p:cNvPr id="50" name="Text 48"/>
           <p:cNvSpPr/>
           <p:nvPr/>
         </p:nvSpPr>
@@ -2548,7 +2587,7 @@
       </p:sp>
       <p:sp>
         <p:nvSpPr>
-          <p:cNvPr id="50" name="Shape 48"/>
+          <p:cNvPr id="51" name="Shape 49"/>
           <p:cNvSpPr/>
           <p:nvPr/>
         </p:nvSpPr>
@@ -2573,7 +2612,7 @@
       </p:sp>
       <p:sp>
         <p:nvSpPr>
-          <p:cNvPr id="51" name="Text 49"/>
+          <p:cNvPr id="52" name="Text 50"/>
           <p:cNvSpPr/>
           <p:nvPr/>
         </p:nvSpPr>
@@ -2612,7 +2651,7 @@
       </p:sp>
       <p:sp>
         <p:nvSpPr>
-          <p:cNvPr id="52" name="Shape 50"/>
+          <p:cNvPr id="53" name="Shape 51"/>
           <p:cNvSpPr/>
           <p:nvPr/>
         </p:nvSpPr>
@@ -2637,7 +2676,7 @@
       </p:sp>
       <p:sp>
         <p:nvSpPr>
-          <p:cNvPr id="53" name="Shape 51"/>
+          <p:cNvPr id="54" name="Shape 52"/>
           <p:cNvSpPr/>
           <p:nvPr/>
         </p:nvSpPr>
@@ -2662,7 +2701,7 @@
       </p:sp>
       <p:sp>
         <p:nvSpPr>
-          <p:cNvPr id="54" name="Shape 52"/>
+          <p:cNvPr id="55" name="Shape 53"/>
           <p:cNvSpPr/>
           <p:nvPr/>
         </p:nvSpPr>
@@ -2687,7 +2726,7 @@
       </p:sp>
       <p:sp>
         <p:nvSpPr>
-          <p:cNvPr id="55" name="Shape 53"/>
+          <p:cNvPr id="56" name="Shape 54"/>
           <p:cNvSpPr/>
           <p:nvPr/>
         </p:nvSpPr>
@@ -2712,7 +2751,7 @@
       </p:sp>
       <p:sp>
         <p:nvSpPr>
-          <p:cNvPr id="56" name="Shape 54"/>
+          <p:cNvPr id="57" name="Shape 55"/>
           <p:cNvSpPr/>
           <p:nvPr/>
         </p:nvSpPr>
@@ -2737,7 +2776,7 @@
       </p:sp>
       <p:sp>
         <p:nvSpPr>
-          <p:cNvPr id="57" name="Text 55"/>
+          <p:cNvPr id="58" name="Text 56"/>
           <p:cNvSpPr/>
           <p:nvPr/>
         </p:nvSpPr>
@@ -2776,7 +2815,7 @@
       </p:sp>
       <p:sp>
         <p:nvSpPr>
-          <p:cNvPr id="58" name="Text 56"/>
+          <p:cNvPr id="59" name="Text 57"/>
           <p:cNvSpPr/>
           <p:nvPr/>
         </p:nvSpPr>
@@ -2815,7 +2854,7 @@
       </p:sp>
       <p:sp>
         <p:nvSpPr>
-          <p:cNvPr id="59" name="Text 57"/>
+          <p:cNvPr id="60" name="Text 58"/>
           <p:cNvSpPr/>
           <p:nvPr/>
         </p:nvSpPr>
@@ -2854,7 +2893,7 @@
       </p:sp>
       <p:sp>
         <p:nvSpPr>
-          <p:cNvPr id="60" name="Text 58"/>
+          <p:cNvPr id="61" name="Text 59"/>
           <p:cNvSpPr/>
           <p:nvPr/>
         </p:nvSpPr>
@@ -2893,7 +2932,7 @@
       </p:sp>
       <p:sp>
         <p:nvSpPr>
-          <p:cNvPr id="61" name="Text 59"/>
+          <p:cNvPr id="62" name="Text 60"/>
           <p:cNvSpPr/>
           <p:nvPr/>
         </p:nvSpPr>
@@ -2932,7 +2971,7 @@
       </p:sp>
       <p:sp>
         <p:nvSpPr>
-          <p:cNvPr id="62" name="Shape 60"/>
+          <p:cNvPr id="63" name="Shape 61"/>
           <p:cNvSpPr/>
           <p:nvPr/>
         </p:nvSpPr>
@@ -2957,7 +2996,7 @@
       </p:sp>
       <p:sp>
         <p:nvSpPr>
-          <p:cNvPr id="63" name="Text 61"/>
+          <p:cNvPr id="64" name="Text 62"/>
           <p:cNvSpPr/>
           <p:nvPr/>
         </p:nvSpPr>
@@ -2996,7 +3035,7 @@
       </p:sp>
       <p:sp>
         <p:nvSpPr>
-          <p:cNvPr id="64" name="Shape 62"/>
+          <p:cNvPr id="65" name="Shape 63"/>
           <p:cNvSpPr/>
           <p:nvPr/>
         </p:nvSpPr>
@@ -3021,7 +3060,7 @@
       </p:sp>
       <p:sp>
         <p:nvSpPr>
-          <p:cNvPr id="65" name="Shape 63"/>
+          <p:cNvPr id="66" name="Shape 64"/>
           <p:cNvSpPr/>
           <p:nvPr/>
         </p:nvSpPr>
@@ -3046,7 +3085,7 @@
       </p:sp>
       <p:sp>
         <p:nvSpPr>
-          <p:cNvPr id="66" name="Shape 64"/>
+          <p:cNvPr id="67" name="Shape 65"/>
           <p:cNvSpPr/>
           <p:nvPr/>
         </p:nvSpPr>
@@ -3071,7 +3110,7 @@
       </p:sp>
       <p:sp>
         <p:nvSpPr>
-          <p:cNvPr id="67" name="Shape 65"/>
+          <p:cNvPr id="68" name="Shape 66"/>
           <p:cNvSpPr/>
           <p:nvPr/>
         </p:nvSpPr>
@@ -3096,7 +3135,7 @@
       </p:sp>
       <p:sp>
         <p:nvSpPr>
-          <p:cNvPr id="68" name="Shape 66"/>
+          <p:cNvPr id="69" name="Shape 67"/>
           <p:cNvSpPr/>
           <p:nvPr/>
         </p:nvSpPr>
@@ -3121,7 +3160,7 @@
       </p:sp>
       <p:sp>
         <p:nvSpPr>
-          <p:cNvPr id="69" name="Text 67"/>
+          <p:cNvPr id="70" name="Text 68"/>
           <p:cNvSpPr/>
           <p:nvPr/>
         </p:nvSpPr>
@@ -3160,7 +3199,7 @@
       </p:sp>
       <p:sp>
         <p:nvSpPr>
-          <p:cNvPr id="70" name="Text 68"/>
+          <p:cNvPr id="71" name="Text 69"/>
           <p:cNvSpPr/>
           <p:nvPr/>
         </p:nvSpPr>
@@ -3199,7 +3238,7 @@
       </p:sp>
       <p:sp>
         <p:nvSpPr>
-          <p:cNvPr id="71" name="Text 69"/>
+          <p:cNvPr id="72" name="Text 70"/>
           <p:cNvSpPr/>
           <p:nvPr/>
         </p:nvSpPr>
@@ -3238,7 +3277,7 @@
       </p:sp>
       <p:sp>
         <p:nvSpPr>
-          <p:cNvPr id="72" name="Text 70"/>
+          <p:cNvPr id="73" name="Text 71"/>
           <p:cNvSpPr/>
           <p:nvPr/>
         </p:nvSpPr>
@@ -3277,7 +3316,7 @@
       </p:sp>
       <p:sp>
         <p:nvSpPr>
-          <p:cNvPr id="73" name="Text 71"/>
+          <p:cNvPr id="74" name="Text 72"/>
           <p:cNvSpPr/>
           <p:nvPr/>
         </p:nvSpPr>
@@ -3316,7 +3355,7 @@
       </p:sp>
       <p:sp>
         <p:nvSpPr>
-          <p:cNvPr id="74" name="Text 72"/>
+          <p:cNvPr id="75" name="Text 73"/>
           <p:cNvSpPr/>
           <p:nvPr/>
         </p:nvSpPr>
@@ -3355,7 +3394,7 @@
       </p:sp>
       <p:sp>
         <p:nvSpPr>
-          <p:cNvPr id="75" name="Shape 73"/>
+          <p:cNvPr id="76" name="Shape 74"/>
           <p:cNvSpPr/>
           <p:nvPr/>
         </p:nvSpPr>
@@ -3380,7 +3419,7 @@
       </p:sp>
       <p:sp>
         <p:nvSpPr>
-          <p:cNvPr id="76" name="Text 74"/>
+          <p:cNvPr id="77" name="Text 75"/>
           <p:cNvSpPr/>
           <p:nvPr/>
         </p:nvSpPr>
@@ -3419,7 +3458,7 @@
       </p:sp>
       <p:sp>
         <p:nvSpPr>
-          <p:cNvPr id="77" name="Shape 75"/>
+          <p:cNvPr id="78" name="Shape 76"/>
           <p:cNvSpPr/>
           <p:nvPr/>
         </p:nvSpPr>
@@ -3444,7 +3483,7 @@
       </p:sp>
       <p:sp>
         <p:nvSpPr>
-          <p:cNvPr id="78" name="Shape 76"/>
+          <p:cNvPr id="79" name="Shape 77"/>
           <p:cNvSpPr/>
           <p:nvPr/>
         </p:nvSpPr>
@@ -3469,7 +3508,7 @@
       </p:sp>
       <p:sp>
         <p:nvSpPr>
-          <p:cNvPr id="79" name="Shape 77"/>
+          <p:cNvPr id="80" name="Shape 78"/>
           <p:cNvSpPr/>
           <p:nvPr/>
         </p:nvSpPr>
@@ -3494,7 +3533,7 @@
       </p:sp>
       <p:sp>
         <p:nvSpPr>
-          <p:cNvPr id="80" name="Shape 78"/>
+          <p:cNvPr id="81" name="Shape 79"/>
           <p:cNvSpPr/>
           <p:nvPr/>
         </p:nvSpPr>
@@ -3519,7 +3558,7 @@
       </p:sp>
       <p:sp>
         <p:nvSpPr>
-          <p:cNvPr id="81" name="Shape 79"/>
+          <p:cNvPr id="82" name="Shape 80"/>
           <p:cNvSpPr/>
           <p:nvPr/>
         </p:nvSpPr>
@@ -3544,7 +3583,7 @@
       </p:sp>
       <p:sp>
         <p:nvSpPr>
-          <p:cNvPr id="82" name="Text 80"/>
+          <p:cNvPr id="83" name="Text 81"/>
           <p:cNvSpPr/>
           <p:nvPr/>
         </p:nvSpPr>
@@ -3583,7 +3622,7 @@
       </p:sp>
       <p:sp>
         <p:nvSpPr>
-          <p:cNvPr id="83" name="Text 81"/>
+          <p:cNvPr id="84" name="Text 82"/>
           <p:cNvSpPr/>
           <p:nvPr/>
         </p:nvSpPr>
@@ -3622,7 +3661,7 @@
       </p:sp>
       <p:sp>
         <p:nvSpPr>
-          <p:cNvPr id="84" name="Text 82"/>
+          <p:cNvPr id="85" name="Text 83"/>
           <p:cNvSpPr/>
           <p:nvPr/>
         </p:nvSpPr>
@@ -3661,7 +3700,7 @@
       </p:sp>
       <p:sp>
         <p:nvSpPr>
-          <p:cNvPr id="85" name="Text 83"/>
+          <p:cNvPr id="86" name="Text 84"/>
           <p:cNvSpPr/>
           <p:nvPr/>
         </p:nvSpPr>
@@ -3700,7 +3739,7 @@
       </p:sp>
       <p:sp>
         <p:nvSpPr>
-          <p:cNvPr id="86" name="Text 84"/>
+          <p:cNvPr id="87" name="Text 85"/>
           <p:cNvSpPr/>
           <p:nvPr/>
         </p:nvSpPr>
@@ -3739,7 +3778,7 @@
       </p:sp>
       <p:sp>
         <p:nvSpPr>
-          <p:cNvPr id="87" name="Text 85"/>
+          <p:cNvPr id="88" name="Text 86"/>
           <p:cNvSpPr/>
           <p:nvPr/>
         </p:nvSpPr>
@@ -3778,7 +3817,7 @@
       </p:sp>
       <p:sp>
         <p:nvSpPr>
-          <p:cNvPr id="88" name="Shape 86"/>
+          <p:cNvPr id="89" name="Shape 87"/>
           <p:cNvSpPr/>
           <p:nvPr/>
         </p:nvSpPr>
@@ -3803,7 +3842,7 @@
       </p:sp>
       <p:sp>
         <p:nvSpPr>
-          <p:cNvPr id="89" name="Text 87"/>
+          <p:cNvPr id="90" name="Text 88"/>
           <p:cNvSpPr/>
           <p:nvPr/>
         </p:nvSpPr>
@@ -3842,7 +3881,7 @@
       </p:sp>
       <p:sp>
         <p:nvSpPr>
-          <p:cNvPr id="90" name="Shape 88"/>
+          <p:cNvPr id="91" name="Shape 89"/>
           <p:cNvSpPr/>
           <p:nvPr/>
         </p:nvSpPr>
@@ -3867,7 +3906,7 @@
       </p:sp>
       <p:sp>
         <p:nvSpPr>
-          <p:cNvPr id="91" name="Shape 89"/>
+          <p:cNvPr id="92" name="Shape 90"/>
           <p:cNvSpPr/>
           <p:nvPr/>
         </p:nvSpPr>
@@ -3892,7 +3931,7 @@
       </p:sp>
       <p:sp>
         <p:nvSpPr>
-          <p:cNvPr id="92" name="Shape 90"/>
+          <p:cNvPr id="93" name="Shape 91"/>
           <p:cNvSpPr/>
           <p:nvPr/>
         </p:nvSpPr>
@@ -3917,7 +3956,7 @@
       </p:sp>
       <p:sp>
         <p:nvSpPr>
-          <p:cNvPr id="93" name="Shape 91"/>
+          <p:cNvPr id="94" name="Shape 92"/>
           <p:cNvSpPr/>
           <p:nvPr/>
         </p:nvSpPr>
@@ -3942,7 +3981,7 @@
       </p:sp>
       <p:sp>
         <p:nvSpPr>
-          <p:cNvPr id="94" name="Shape 92"/>
+          <p:cNvPr id="95" name="Shape 93"/>
           <p:cNvSpPr/>
           <p:nvPr/>
         </p:nvSpPr>
@@ -3967,7 +4006,7 @@
       </p:sp>
       <p:sp>
         <p:nvSpPr>
-          <p:cNvPr id="95" name="Text 93"/>
+          <p:cNvPr id="96" name="Text 94"/>
           <p:cNvSpPr/>
           <p:nvPr/>
         </p:nvSpPr>
@@ -4006,7 +4045,7 @@
       </p:sp>
       <p:sp>
         <p:nvSpPr>
-          <p:cNvPr id="96" name="Text 94"/>
+          <p:cNvPr id="97" name="Text 95"/>
           <p:cNvSpPr/>
           <p:nvPr/>
         </p:nvSpPr>
@@ -4045,7 +4084,7 @@
       </p:sp>
       <p:sp>
         <p:nvSpPr>
-          <p:cNvPr id="97" name="Text 95"/>
+          <p:cNvPr id="98" name="Text 96"/>
           <p:cNvSpPr/>
           <p:nvPr/>
         </p:nvSpPr>
@@ -4084,7 +4123,7 @@
       </p:sp>
       <p:sp>
         <p:nvSpPr>
-          <p:cNvPr id="98" name="Text 96"/>
+          <p:cNvPr id="99" name="Text 97"/>
           <p:cNvSpPr/>
           <p:nvPr/>
         </p:nvSpPr>
@@ -4123,7 +4162,7 @@
       </p:sp>
       <p:sp>
         <p:nvSpPr>
-          <p:cNvPr id="99" name="Text 97"/>
+          <p:cNvPr id="100" name="Text 98"/>
           <p:cNvSpPr/>
           <p:nvPr/>
         </p:nvSpPr>
@@ -4162,7 +4201,7 @@
       </p:sp>
       <p:sp>
         <p:nvSpPr>
-          <p:cNvPr id="100" name="Text 98"/>
+          <p:cNvPr id="101" name="Text 99"/>
           <p:cNvSpPr/>
           <p:nvPr/>
         </p:nvSpPr>
@@ -4201,7 +4240,7 @@
       </p:sp>
       <p:sp>
         <p:nvSpPr>
-          <p:cNvPr id="101" name="Text 99"/>
+          <p:cNvPr id="102" name="Text 100"/>
           <p:cNvSpPr/>
           <p:nvPr/>
         </p:nvSpPr>
@@ -4240,7 +4279,7 @@
       </p:sp>
       <p:sp>
         <p:nvSpPr>
-          <p:cNvPr id="102" name="Text 100"/>
+          <p:cNvPr id="103" name="Text 101"/>
           <p:cNvSpPr/>
           <p:nvPr/>
         </p:nvSpPr>
@@ -4279,7 +4318,7 @@
       </p:sp>
       <p:sp>
         <p:nvSpPr>
-          <p:cNvPr id="103" name="Text 101"/>
+          <p:cNvPr id="104" name="Text 102"/>
           <p:cNvSpPr/>
           <p:nvPr/>
         </p:nvSpPr>
@@ -4318,7 +4357,7 @@
       </p:sp>
       <p:sp>
         <p:nvSpPr>
-          <p:cNvPr id="104" name="Shape 102"/>
+          <p:cNvPr id="105" name="Shape 103"/>
           <p:cNvSpPr/>
           <p:nvPr/>
         </p:nvSpPr>
@@ -4338,7 +4377,7 @@
       </p:sp>
       <p:sp>
         <p:nvSpPr>
-          <p:cNvPr id="105" name="Text 103"/>
+          <p:cNvPr id="106" name="Text 104"/>
           <p:cNvSpPr/>
           <p:nvPr/>
         </p:nvSpPr>
@@ -4369,7 +4408,7 @@
                 <a:ea typeface="Calibri" pitchFamily="34" charset="-122"/>
                 <a:cs typeface="Calibri" pitchFamily="34" charset="-120"/>
               </a:rPr>
-              <a:t>★ 中古なら月1,980円・初期費用ゼロ・配送無料。新品でも月2,980円で競合より大幅にリーズナブル。生協独占提携で中小規模大学への先行参入が可能です。</a:t>
+              <a:t>★ 中古（リユース）なら月1,980円・2年合計47,520円で競合比▲21,480円。初期費用ゼロ・配送回収無料。中小規模大学の生協とは独占提携が可能です。</a:t>
             </a:r>
             <a:endParaRPr lang="en-US" sz="900" dirty="0"/>
           </a:p>

--- a/料金比較表_v1.pptx
+++ b/料金比較表_v1.pptx
@@ -980,7 +980,7 @@
                 <a:ea typeface="Calibri" pitchFamily="34" charset="-122"/>
                 <a:cs typeface="Calibri" pitchFamily="34" charset="-120"/>
               </a:rPr>
-              <a:t>※競合価格は公開情報をもとにした概算。正確な金額は各社サイトでご確認ください。</a:t>
+              <a:t>※てぶらでどっとこむは6点セット（冷蔵庫90L・洗濯機4.5kg・電子レンジ固定＋選択3点）月5,500円。3点のみプランは要確認。かして！どっとこむは公式実績値。</a:t>
             </a:r>
             <a:endParaRPr lang="en-US" sz="800" dirty="0"/>
           </a:p>
@@ -1451,7 +1451,7 @@
                 <a:ea typeface="Calibri" pitchFamily="34" charset="-122"/>
                 <a:cs typeface="Calibri" pitchFamily="34" charset="-120"/>
               </a:rPr>
-              <a:t>どっとこむ</a:t>
+              <a:t>どっとこむ※</a:t>
             </a:r>
             <a:endParaRPr lang="en-US" sz="1000" dirty="0"/>
           </a:p>
@@ -1994,13 +1994,13 @@
             <a:r>
               <a:rPr lang="en-US" sz="1050" dirty="0">
                 <a:solidFill>
-                  <a:srgbClr val="999999"/>
-                </a:solidFill>
-                <a:latin typeface="Calibri" pitchFamily="34" charset="0"/>
-                <a:ea typeface="Calibri" pitchFamily="34" charset="-122"/>
-                <a:cs typeface="Calibri" pitchFamily="34" charset="-120"/>
-              </a:rPr>
-              <a:t>要確認</a:t>
+                  <a:srgbClr val="333333"/>
+                </a:solidFill>
+                <a:latin typeface="Calibri" pitchFamily="34" charset="0"/>
+                <a:ea typeface="Calibri" pitchFamily="34" charset="-122"/>
+                <a:cs typeface="Calibri" pitchFamily="34" charset="-120"/>
+              </a:rPr>
+              <a:t>5,500 円</a:t>
             </a:r>
             <a:endParaRPr lang="en-US" sz="1050" dirty="0"/>
           </a:p>
@@ -2039,7 +2039,7 @@
                 <a:ea typeface="Calibri" pitchFamily="34" charset="-122"/>
                 <a:cs typeface="Calibri" pitchFamily="34" charset="-120"/>
               </a:rPr>
-              <a:t>（公式HP参照）</a:t>
+              <a:t>（6点セット）※3点は要確認</a:t>
             </a:r>
             <a:endParaRPr lang="en-US" sz="750" dirty="0"/>
           </a:p>
@@ -2476,8 +2476,8 @@
         </p:nvSpPr>
         <p:spPr>
           <a:xfrm>
-            <a:off x="5779008" y="1691640"/>
-            <a:ext cx="1389888" cy="521208"/>
+            <a:off x="5779008" y="1728216"/>
+            <a:ext cx="1389888" cy="310896"/>
           </a:xfrm>
           <a:prstGeom prst="rect">
             <a:avLst/>
@@ -2510,6 +2510,45 @@
       <p:sp>
         <p:nvSpPr>
           <p:cNvPr id="49" name="Text 47"/>
+          <p:cNvSpPr/>
+          <p:nvPr/>
+        </p:nvSpPr>
+        <p:spPr>
+          <a:xfrm>
+            <a:off x="5779008" y="2020824"/>
+            <a:ext cx="1389888" cy="164592"/>
+          </a:xfrm>
+          <a:prstGeom prst="rect">
+            <a:avLst/>
+          </a:prstGeom>
+          <a:noFill/>
+          <a:ln/>
+        </p:spPr>
+        <p:txBody>
+          <a:bodyPr wrap="square" rtlCol="0" anchor="ctr"/>
+          <a:lstStyle/>
+          <a:p>
+            <a:pPr algn="ctr" indent="0" marL="0">
+              <a:buNone/>
+            </a:pPr>
+            <a:r>
+              <a:rPr lang="en-US" sz="750" dirty="0">
+                <a:solidFill>
+                  <a:srgbClr val="999999"/>
+                </a:solidFill>
+                <a:latin typeface="Calibri" pitchFamily="34" charset="0"/>
+                <a:ea typeface="Calibri" pitchFamily="34" charset="-122"/>
+                <a:cs typeface="Calibri" pitchFamily="34" charset="-120"/>
+              </a:rPr>
+              <a:t>（6点セット基準）</a:t>
+            </a:r>
+            <a:endParaRPr lang="en-US" sz="750" dirty="0"/>
+          </a:p>
+        </p:txBody>
+      </p:sp>
+      <p:sp>
+        <p:nvSpPr>
+          <p:cNvPr id="50" name="Text 48"/>
           <p:cNvSpPr/>
           <p:nvPr/>
         </p:nvSpPr>
@@ -2548,7 +2587,7 @@
       </p:sp>
       <p:sp>
         <p:nvSpPr>
-          <p:cNvPr id="50" name="Text 48"/>
+          <p:cNvPr id="51" name="Text 49"/>
           <p:cNvSpPr/>
           <p:nvPr/>
         </p:nvSpPr>
@@ -2587,7 +2626,7 @@
       </p:sp>
       <p:sp>
         <p:nvSpPr>
-          <p:cNvPr id="51" name="Shape 49"/>
+          <p:cNvPr id="52" name="Shape 50"/>
           <p:cNvSpPr/>
           <p:nvPr/>
         </p:nvSpPr>
@@ -2612,7 +2651,7 @@
       </p:sp>
       <p:sp>
         <p:nvSpPr>
-          <p:cNvPr id="52" name="Text 50"/>
+          <p:cNvPr id="53" name="Text 51"/>
           <p:cNvSpPr/>
           <p:nvPr/>
         </p:nvSpPr>
@@ -2651,7 +2690,7 @@
       </p:sp>
       <p:sp>
         <p:nvSpPr>
-          <p:cNvPr id="53" name="Shape 51"/>
+          <p:cNvPr id="54" name="Shape 52"/>
           <p:cNvSpPr/>
           <p:nvPr/>
         </p:nvSpPr>
@@ -2676,7 +2715,7 @@
       </p:sp>
       <p:sp>
         <p:nvSpPr>
-          <p:cNvPr id="54" name="Shape 52"/>
+          <p:cNvPr id="55" name="Shape 53"/>
           <p:cNvSpPr/>
           <p:nvPr/>
         </p:nvSpPr>
@@ -2701,7 +2740,7 @@
       </p:sp>
       <p:sp>
         <p:nvSpPr>
-          <p:cNvPr id="55" name="Shape 53"/>
+          <p:cNvPr id="56" name="Shape 54"/>
           <p:cNvSpPr/>
           <p:nvPr/>
         </p:nvSpPr>
@@ -2726,7 +2765,7 @@
       </p:sp>
       <p:sp>
         <p:nvSpPr>
-          <p:cNvPr id="56" name="Shape 54"/>
+          <p:cNvPr id="57" name="Shape 55"/>
           <p:cNvSpPr/>
           <p:nvPr/>
         </p:nvSpPr>
@@ -2751,7 +2790,7 @@
       </p:sp>
       <p:sp>
         <p:nvSpPr>
-          <p:cNvPr id="57" name="Shape 55"/>
+          <p:cNvPr id="58" name="Shape 56"/>
           <p:cNvSpPr/>
           <p:nvPr/>
         </p:nvSpPr>
@@ -2776,7 +2815,7 @@
       </p:sp>
       <p:sp>
         <p:nvSpPr>
-          <p:cNvPr id="58" name="Text 56"/>
+          <p:cNvPr id="59" name="Text 57"/>
           <p:cNvSpPr/>
           <p:nvPr/>
         </p:nvSpPr>
@@ -2815,7 +2854,7 @@
       </p:sp>
       <p:sp>
         <p:nvSpPr>
-          <p:cNvPr id="59" name="Text 57"/>
+          <p:cNvPr id="60" name="Text 58"/>
           <p:cNvSpPr/>
           <p:nvPr/>
         </p:nvSpPr>
@@ -2854,7 +2893,7 @@
       </p:sp>
       <p:sp>
         <p:nvSpPr>
-          <p:cNvPr id="60" name="Text 58"/>
+          <p:cNvPr id="61" name="Text 59"/>
           <p:cNvSpPr/>
           <p:nvPr/>
         </p:nvSpPr>
@@ -2893,7 +2932,7 @@
       </p:sp>
       <p:sp>
         <p:nvSpPr>
-          <p:cNvPr id="61" name="Text 59"/>
+          <p:cNvPr id="62" name="Text 60"/>
           <p:cNvSpPr/>
           <p:nvPr/>
         </p:nvSpPr>
@@ -2932,7 +2971,7 @@
       </p:sp>
       <p:sp>
         <p:nvSpPr>
-          <p:cNvPr id="62" name="Text 60"/>
+          <p:cNvPr id="63" name="Text 61"/>
           <p:cNvSpPr/>
           <p:nvPr/>
         </p:nvSpPr>
@@ -2971,7 +3010,7 @@
       </p:sp>
       <p:sp>
         <p:nvSpPr>
-          <p:cNvPr id="63" name="Shape 61"/>
+          <p:cNvPr id="64" name="Shape 62"/>
           <p:cNvSpPr/>
           <p:nvPr/>
         </p:nvSpPr>
@@ -2996,7 +3035,7 @@
       </p:sp>
       <p:sp>
         <p:nvSpPr>
-          <p:cNvPr id="64" name="Text 62"/>
+          <p:cNvPr id="65" name="Text 63"/>
           <p:cNvSpPr/>
           <p:nvPr/>
         </p:nvSpPr>
@@ -3035,7 +3074,7 @@
       </p:sp>
       <p:sp>
         <p:nvSpPr>
-          <p:cNvPr id="65" name="Shape 63"/>
+          <p:cNvPr id="66" name="Shape 64"/>
           <p:cNvSpPr/>
           <p:nvPr/>
         </p:nvSpPr>
@@ -3060,7 +3099,7 @@
       </p:sp>
       <p:sp>
         <p:nvSpPr>
-          <p:cNvPr id="66" name="Shape 64"/>
+          <p:cNvPr id="67" name="Shape 65"/>
           <p:cNvSpPr/>
           <p:nvPr/>
         </p:nvSpPr>
@@ -3085,7 +3124,7 @@
       </p:sp>
       <p:sp>
         <p:nvSpPr>
-          <p:cNvPr id="67" name="Shape 65"/>
+          <p:cNvPr id="68" name="Shape 66"/>
           <p:cNvSpPr/>
           <p:nvPr/>
         </p:nvSpPr>
@@ -3110,7 +3149,7 @@
       </p:sp>
       <p:sp>
         <p:nvSpPr>
-          <p:cNvPr id="68" name="Shape 66"/>
+          <p:cNvPr id="69" name="Shape 67"/>
           <p:cNvSpPr/>
           <p:nvPr/>
         </p:nvSpPr>
@@ -3135,7 +3174,7 @@
       </p:sp>
       <p:sp>
         <p:nvSpPr>
-          <p:cNvPr id="69" name="Shape 67"/>
+          <p:cNvPr id="70" name="Shape 68"/>
           <p:cNvSpPr/>
           <p:nvPr/>
         </p:nvSpPr>
@@ -3160,7 +3199,7 @@
       </p:sp>
       <p:sp>
         <p:nvSpPr>
-          <p:cNvPr id="70" name="Text 68"/>
+          <p:cNvPr id="71" name="Text 69"/>
           <p:cNvSpPr/>
           <p:nvPr/>
         </p:nvSpPr>
@@ -3199,7 +3238,7 @@
       </p:sp>
       <p:sp>
         <p:nvSpPr>
-          <p:cNvPr id="71" name="Text 69"/>
+          <p:cNvPr id="72" name="Text 70"/>
           <p:cNvSpPr/>
           <p:nvPr/>
         </p:nvSpPr>
@@ -3238,7 +3277,7 @@
       </p:sp>
       <p:sp>
         <p:nvSpPr>
-          <p:cNvPr id="72" name="Text 70"/>
+          <p:cNvPr id="73" name="Text 71"/>
           <p:cNvSpPr/>
           <p:nvPr/>
         </p:nvSpPr>
@@ -3277,7 +3316,7 @@
       </p:sp>
       <p:sp>
         <p:nvSpPr>
-          <p:cNvPr id="73" name="Text 71"/>
+          <p:cNvPr id="74" name="Text 72"/>
           <p:cNvSpPr/>
           <p:nvPr/>
         </p:nvSpPr>
@@ -3316,7 +3355,7 @@
       </p:sp>
       <p:sp>
         <p:nvSpPr>
-          <p:cNvPr id="74" name="Text 72"/>
+          <p:cNvPr id="75" name="Text 73"/>
           <p:cNvSpPr/>
           <p:nvPr/>
         </p:nvSpPr>
@@ -3355,7 +3394,7 @@
       </p:sp>
       <p:sp>
         <p:nvSpPr>
-          <p:cNvPr id="75" name="Text 73"/>
+          <p:cNvPr id="76" name="Text 74"/>
           <p:cNvSpPr/>
           <p:nvPr/>
         </p:nvSpPr>
@@ -3394,7 +3433,7 @@
       </p:sp>
       <p:sp>
         <p:nvSpPr>
-          <p:cNvPr id="76" name="Shape 74"/>
+          <p:cNvPr id="77" name="Shape 75"/>
           <p:cNvSpPr/>
           <p:nvPr/>
         </p:nvSpPr>
@@ -3419,7 +3458,7 @@
       </p:sp>
       <p:sp>
         <p:nvSpPr>
-          <p:cNvPr id="77" name="Text 75"/>
+          <p:cNvPr id="78" name="Text 76"/>
           <p:cNvSpPr/>
           <p:nvPr/>
         </p:nvSpPr>
@@ -3458,7 +3497,7 @@
       </p:sp>
       <p:sp>
         <p:nvSpPr>
-          <p:cNvPr id="78" name="Shape 76"/>
+          <p:cNvPr id="79" name="Shape 77"/>
           <p:cNvSpPr/>
           <p:nvPr/>
         </p:nvSpPr>
@@ -3483,7 +3522,7 @@
       </p:sp>
       <p:sp>
         <p:nvSpPr>
-          <p:cNvPr id="79" name="Shape 77"/>
+          <p:cNvPr id="80" name="Shape 78"/>
           <p:cNvSpPr/>
           <p:nvPr/>
         </p:nvSpPr>
@@ -3508,7 +3547,7 @@
       </p:sp>
       <p:sp>
         <p:nvSpPr>
-          <p:cNvPr id="80" name="Shape 78"/>
+          <p:cNvPr id="81" name="Shape 79"/>
           <p:cNvSpPr/>
           <p:nvPr/>
         </p:nvSpPr>
@@ -3533,7 +3572,7 @@
       </p:sp>
       <p:sp>
         <p:nvSpPr>
-          <p:cNvPr id="81" name="Shape 79"/>
+          <p:cNvPr id="82" name="Shape 80"/>
           <p:cNvSpPr/>
           <p:nvPr/>
         </p:nvSpPr>
@@ -3558,7 +3597,7 @@
       </p:sp>
       <p:sp>
         <p:nvSpPr>
-          <p:cNvPr id="82" name="Shape 80"/>
+          <p:cNvPr id="83" name="Shape 81"/>
           <p:cNvSpPr/>
           <p:nvPr/>
         </p:nvSpPr>
@@ -3583,7 +3622,7 @@
       </p:sp>
       <p:sp>
         <p:nvSpPr>
-          <p:cNvPr id="83" name="Text 81"/>
+          <p:cNvPr id="84" name="Text 82"/>
           <p:cNvSpPr/>
           <p:nvPr/>
         </p:nvSpPr>
@@ -3622,7 +3661,7 @@
       </p:sp>
       <p:sp>
         <p:nvSpPr>
-          <p:cNvPr id="84" name="Text 82"/>
+          <p:cNvPr id="85" name="Text 83"/>
           <p:cNvSpPr/>
           <p:nvPr/>
         </p:nvSpPr>
@@ -3661,7 +3700,7 @@
       </p:sp>
       <p:sp>
         <p:nvSpPr>
-          <p:cNvPr id="85" name="Text 83"/>
+          <p:cNvPr id="86" name="Text 84"/>
           <p:cNvSpPr/>
           <p:nvPr/>
         </p:nvSpPr>
@@ -3700,7 +3739,7 @@
       </p:sp>
       <p:sp>
         <p:nvSpPr>
-          <p:cNvPr id="86" name="Text 84"/>
+          <p:cNvPr id="87" name="Text 85"/>
           <p:cNvSpPr/>
           <p:nvPr/>
         </p:nvSpPr>
@@ -3739,7 +3778,7 @@
       </p:sp>
       <p:sp>
         <p:nvSpPr>
-          <p:cNvPr id="87" name="Text 85"/>
+          <p:cNvPr id="88" name="Text 86"/>
           <p:cNvSpPr/>
           <p:nvPr/>
         </p:nvSpPr>
@@ -3778,7 +3817,7 @@
       </p:sp>
       <p:sp>
         <p:nvSpPr>
-          <p:cNvPr id="88" name="Text 86"/>
+          <p:cNvPr id="89" name="Text 87"/>
           <p:cNvSpPr/>
           <p:nvPr/>
         </p:nvSpPr>
@@ -3817,7 +3856,7 @@
       </p:sp>
       <p:sp>
         <p:nvSpPr>
-          <p:cNvPr id="89" name="Shape 87"/>
+          <p:cNvPr id="90" name="Shape 88"/>
           <p:cNvSpPr/>
           <p:nvPr/>
         </p:nvSpPr>
@@ -3842,7 +3881,7 @@
       </p:sp>
       <p:sp>
         <p:nvSpPr>
-          <p:cNvPr id="90" name="Text 88"/>
+          <p:cNvPr id="91" name="Text 89"/>
           <p:cNvSpPr/>
           <p:nvPr/>
         </p:nvSpPr>
@@ -3881,7 +3920,7 @@
       </p:sp>
       <p:sp>
         <p:nvSpPr>
-          <p:cNvPr id="91" name="Shape 89"/>
+          <p:cNvPr id="92" name="Shape 90"/>
           <p:cNvSpPr/>
           <p:nvPr/>
         </p:nvSpPr>
@@ -3906,7 +3945,7 @@
       </p:sp>
       <p:sp>
         <p:nvSpPr>
-          <p:cNvPr id="92" name="Shape 90"/>
+          <p:cNvPr id="93" name="Shape 91"/>
           <p:cNvSpPr/>
           <p:nvPr/>
         </p:nvSpPr>
@@ -3931,7 +3970,7 @@
       </p:sp>
       <p:sp>
         <p:nvSpPr>
-          <p:cNvPr id="93" name="Shape 91"/>
+          <p:cNvPr id="94" name="Shape 92"/>
           <p:cNvSpPr/>
           <p:nvPr/>
         </p:nvSpPr>
@@ -3956,7 +3995,7 @@
       </p:sp>
       <p:sp>
         <p:nvSpPr>
-          <p:cNvPr id="94" name="Shape 92"/>
+          <p:cNvPr id="95" name="Shape 93"/>
           <p:cNvSpPr/>
           <p:nvPr/>
         </p:nvSpPr>
@@ -3981,7 +4020,7 @@
       </p:sp>
       <p:sp>
         <p:nvSpPr>
-          <p:cNvPr id="95" name="Shape 93"/>
+          <p:cNvPr id="96" name="Shape 94"/>
           <p:cNvSpPr/>
           <p:nvPr/>
         </p:nvSpPr>
@@ -4006,7 +4045,7 @@
       </p:sp>
       <p:sp>
         <p:nvSpPr>
-          <p:cNvPr id="96" name="Text 94"/>
+          <p:cNvPr id="97" name="Text 95"/>
           <p:cNvSpPr/>
           <p:nvPr/>
         </p:nvSpPr>
@@ -4045,7 +4084,7 @@
       </p:sp>
       <p:sp>
         <p:nvSpPr>
-          <p:cNvPr id="97" name="Text 95"/>
+          <p:cNvPr id="98" name="Text 96"/>
           <p:cNvSpPr/>
           <p:nvPr/>
         </p:nvSpPr>
@@ -4084,7 +4123,7 @@
       </p:sp>
       <p:sp>
         <p:nvSpPr>
-          <p:cNvPr id="98" name="Text 96"/>
+          <p:cNvPr id="99" name="Text 97"/>
           <p:cNvSpPr/>
           <p:nvPr/>
         </p:nvSpPr>
@@ -4123,7 +4162,7 @@
       </p:sp>
       <p:sp>
         <p:nvSpPr>
-          <p:cNvPr id="99" name="Text 97"/>
+          <p:cNvPr id="100" name="Text 98"/>
           <p:cNvSpPr/>
           <p:nvPr/>
         </p:nvSpPr>
@@ -4162,7 +4201,7 @@
       </p:sp>
       <p:sp>
         <p:nvSpPr>
-          <p:cNvPr id="100" name="Text 98"/>
+          <p:cNvPr id="101" name="Text 99"/>
           <p:cNvSpPr/>
           <p:nvPr/>
         </p:nvSpPr>
@@ -4201,7 +4240,7 @@
       </p:sp>
       <p:sp>
         <p:nvSpPr>
-          <p:cNvPr id="101" name="Text 99"/>
+          <p:cNvPr id="102" name="Text 100"/>
           <p:cNvSpPr/>
           <p:nvPr/>
         </p:nvSpPr>
@@ -4240,7 +4279,7 @@
       </p:sp>
       <p:sp>
         <p:nvSpPr>
-          <p:cNvPr id="102" name="Text 100"/>
+          <p:cNvPr id="103" name="Text 101"/>
           <p:cNvSpPr/>
           <p:nvPr/>
         </p:nvSpPr>
@@ -4279,7 +4318,7 @@
       </p:sp>
       <p:sp>
         <p:nvSpPr>
-          <p:cNvPr id="103" name="Text 101"/>
+          <p:cNvPr id="104" name="Text 102"/>
           <p:cNvSpPr/>
           <p:nvPr/>
         </p:nvSpPr>
@@ -4318,7 +4357,7 @@
       </p:sp>
       <p:sp>
         <p:nvSpPr>
-          <p:cNvPr id="104" name="Text 102"/>
+          <p:cNvPr id="105" name="Text 103"/>
           <p:cNvSpPr/>
           <p:nvPr/>
         </p:nvSpPr>
@@ -4357,7 +4396,7 @@
       </p:sp>
       <p:sp>
         <p:nvSpPr>
-          <p:cNvPr id="105" name="Shape 103"/>
+          <p:cNvPr id="106" name="Shape 104"/>
           <p:cNvSpPr/>
           <p:nvPr/>
         </p:nvSpPr>
@@ -4377,7 +4416,7 @@
       </p:sp>
       <p:sp>
         <p:nvSpPr>
-          <p:cNvPr id="106" name="Text 104"/>
+          <p:cNvPr id="107" name="Text 105"/>
           <p:cNvSpPr/>
           <p:nvPr/>
         </p:nvSpPr>

--- a/料金比較表_v1.pptx
+++ b/料金比較表_v1.pptx
@@ -1190,7 +1190,7 @@
                 <a:ea typeface="Calibri" pitchFamily="34" charset="-122"/>
                 <a:cs typeface="Calibri" pitchFamily="34" charset="-120"/>
               </a:rPr>
-              <a:t>月額 1,980円</a:t>
+              <a:t>月額 1,880円</a:t>
             </a:r>
             <a:endParaRPr lang="en-US" sz="1000" dirty="0"/>
           </a:p>
@@ -1277,7 +1277,7 @@
                 <a:ea typeface="Calibri" pitchFamily="34" charset="-122"/>
                 <a:cs typeface="Calibri" pitchFamily="34" charset="-120"/>
               </a:rPr>
-              <a:t>月額 2,980円</a:t>
+              <a:t>月額 2,480円</a:t>
             </a:r>
             <a:endParaRPr lang="en-US" sz="1000" dirty="0"/>
           </a:p>
@@ -1766,7 +1766,7 @@
                 <a:ea typeface="Calibri" pitchFamily="34" charset="-122"/>
                 <a:cs typeface="Calibri" pitchFamily="34" charset="-120"/>
               </a:rPr>
-              <a:t>1,980 円</a:t>
+              <a:t>1,880 円</a:t>
             </a:r>
             <a:endParaRPr lang="en-US" sz="1200" dirty="0"/>
           </a:p>
@@ -1844,7 +1844,7 @@
                 <a:ea typeface="Calibri" pitchFamily="34" charset="-122"/>
                 <a:cs typeface="Calibri" pitchFamily="34" charset="-120"/>
               </a:rPr>
-              <a:t>2,980 円</a:t>
+              <a:t>2,480 円</a:t>
             </a:r>
             <a:endParaRPr lang="en-US" sz="1200" dirty="0"/>
           </a:p>
@@ -2345,7 +2345,7 @@
                 <a:ea typeface="Calibri" pitchFamily="34" charset="-122"/>
                 <a:cs typeface="Calibri" pitchFamily="34" charset="-120"/>
               </a:rPr>
-              <a:t>47,520 円</a:t>
+              <a:t>45,120 円</a:t>
             </a:r>
             <a:endParaRPr lang="en-US" sz="1200" dirty="0"/>
           </a:p>
@@ -2384,7 +2384,7 @@
                 <a:ea typeface="Calibri" pitchFamily="34" charset="-122"/>
                 <a:cs typeface="Calibri" pitchFamily="34" charset="-120"/>
               </a:rPr>
-              <a:t>71,520 円</a:t>
+              <a:t>59,520 円</a:t>
             </a:r>
             <a:endParaRPr lang="en-US" sz="1200" dirty="0"/>
           </a:p>
@@ -4447,7 +4447,7 @@
                 <a:ea typeface="Calibri" pitchFamily="34" charset="-122"/>
                 <a:cs typeface="Calibri" pitchFamily="34" charset="-120"/>
               </a:rPr>
-              <a:t>★ 中古（リユース）なら月1,980円・2年合計47,520円で競合比▲21,480円。初期費用ゼロ・配送回収無料。中小規模大学の生協とは独占提携が可能です。</a:t>
+              <a:t>★ 中古（リユース）なら月1,880円・2年合計45,120円で競合比▲23,880円。初期費用ゼロ・配送回収無料。中小規模大学の生協とは独占提携が可能です。</a:t>
             </a:r>
             <a:endParaRPr lang="en-US" sz="900" dirty="0"/>
           </a:p>

--- a/料金比較表_v1.pptx
+++ b/料金比較表_v1.pptx
@@ -1758,7 +1758,7 @@
               <a:buNone/>
             </a:pPr>
             <a:r>
-              <a:rPr lang="en-US" sz="1200" b="1" dirty="0">
+              <a:rPr lang="en-US" sz="1100" b="1" dirty="0">
                 <a:solidFill>
                   <a:srgbClr val="DD7E6B"/>
                 </a:solidFill>
@@ -1768,7 +1768,7 @@
               </a:rPr>
               <a:t>1,880 円</a:t>
             </a:r>
-            <a:endParaRPr lang="en-US" sz="1200" dirty="0"/>
+            <a:endParaRPr lang="en-US" sz="1100" dirty="0"/>
           </a:p>
         </p:txBody>
       </p:sp>
@@ -1797,7 +1797,7 @@
               <a:buNone/>
             </a:pPr>
             <a:r>
-              <a:rPr lang="en-US" sz="750" dirty="0">
+              <a:rPr lang="en-US" sz="800" dirty="0">
                 <a:solidFill>
                   <a:srgbClr val="999999"/>
                 </a:solidFill>
@@ -1805,9 +1805,9 @@
                 <a:ea typeface="Calibri" pitchFamily="34" charset="-122"/>
                 <a:cs typeface="Calibri" pitchFamily="34" charset="-120"/>
               </a:rPr>
-              <a:t>（2年契約）</a:t>
-            </a:r>
-            <a:endParaRPr lang="en-US" sz="750" dirty="0"/>
+              <a:t>2年契約</a:t>
+            </a:r>
+            <a:endParaRPr lang="en-US" sz="800" dirty="0"/>
           </a:p>
         </p:txBody>
       </p:sp>
@@ -1836,7 +1836,7 @@
               <a:buNone/>
             </a:pPr>
             <a:r>
-              <a:rPr lang="en-US" sz="1200" b="1" dirty="0">
+              <a:rPr lang="en-US" sz="1100" b="1" dirty="0">
                 <a:solidFill>
                   <a:srgbClr val="C05F4C"/>
                 </a:solidFill>
@@ -1846,7 +1846,7 @@
               </a:rPr>
               <a:t>2,480 円</a:t>
             </a:r>
-            <a:endParaRPr lang="en-US" sz="1200" dirty="0"/>
+            <a:endParaRPr lang="en-US" sz="1100" dirty="0"/>
           </a:p>
         </p:txBody>
       </p:sp>
@@ -1875,7 +1875,7 @@
               <a:buNone/>
             </a:pPr>
             <a:r>
-              <a:rPr lang="en-US" sz="750" dirty="0">
+              <a:rPr lang="en-US" sz="800" dirty="0">
                 <a:solidFill>
                   <a:srgbClr val="999999"/>
                 </a:solidFill>
@@ -1883,9 +1883,9 @@
                 <a:ea typeface="Calibri" pitchFamily="34" charset="-122"/>
                 <a:cs typeface="Calibri" pitchFamily="34" charset="-120"/>
               </a:rPr>
-              <a:t>（2年契約）</a:t>
-            </a:r>
-            <a:endParaRPr lang="en-US" sz="750" dirty="0"/>
+              <a:t>2年契約</a:t>
+            </a:r>
+            <a:endParaRPr lang="en-US" sz="800" dirty="0"/>
           </a:p>
         </p:txBody>
       </p:sp>
@@ -1914,7 +1914,7 @@
               <a:buNone/>
             </a:pPr>
             <a:r>
-              <a:rPr lang="en-US" sz="1050" dirty="0">
+              <a:rPr lang="en-US" sz="1100" dirty="0">
                 <a:solidFill>
                   <a:srgbClr val="333333"/>
                 </a:solidFill>
@@ -1924,7 +1924,7 @@
               </a:rPr>
               <a:t>2,875 円</a:t>
             </a:r>
-            <a:endParaRPr lang="en-US" sz="1050" dirty="0"/>
+            <a:endParaRPr lang="en-US" sz="1100" dirty="0"/>
           </a:p>
         </p:txBody>
       </p:sp>
@@ -1953,7 +1953,7 @@
               <a:buNone/>
             </a:pPr>
             <a:r>
-              <a:rPr lang="en-US" sz="750" dirty="0">
+              <a:rPr lang="en-US" sz="800" dirty="0">
                 <a:solidFill>
                   <a:srgbClr val="999999"/>
                 </a:solidFill>
@@ -1961,9 +1961,9 @@
                 <a:ea typeface="Calibri" pitchFamily="34" charset="-122"/>
                 <a:cs typeface="Calibri" pitchFamily="34" charset="-120"/>
               </a:rPr>
-              <a:t>（新品・2年／4年1,604円）</a:t>
-            </a:r>
-            <a:endParaRPr lang="en-US" sz="750" dirty="0"/>
+              <a:t>新品2年 ／ 4年1,604円</a:t>
+            </a:r>
+            <a:endParaRPr lang="en-US" sz="800" dirty="0"/>
           </a:p>
         </p:txBody>
       </p:sp>
@@ -1992,7 +1992,7 @@
               <a:buNone/>
             </a:pPr>
             <a:r>
-              <a:rPr lang="en-US" sz="1050" dirty="0">
+              <a:rPr lang="en-US" sz="1100" dirty="0">
                 <a:solidFill>
                   <a:srgbClr val="333333"/>
                 </a:solidFill>
@@ -2002,7 +2002,7 @@
               </a:rPr>
               <a:t>5,500 円</a:t>
             </a:r>
-            <a:endParaRPr lang="en-US" sz="1050" dirty="0"/>
+            <a:endParaRPr lang="en-US" sz="1100" dirty="0"/>
           </a:p>
         </p:txBody>
       </p:sp>
@@ -2031,7 +2031,7 @@
               <a:buNone/>
             </a:pPr>
             <a:r>
-              <a:rPr lang="en-US" sz="750" dirty="0">
+              <a:rPr lang="en-US" sz="800" dirty="0">
                 <a:solidFill>
                   <a:srgbClr val="999999"/>
                 </a:solidFill>
@@ -2039,9 +2039,9 @@
                 <a:ea typeface="Calibri" pitchFamily="34" charset="-122"/>
                 <a:cs typeface="Calibri" pitchFamily="34" charset="-120"/>
               </a:rPr>
-              <a:t>（6点セット）※3点は要確認</a:t>
-            </a:r>
-            <a:endParaRPr lang="en-US" sz="750" dirty="0"/>
+              <a:t>6点セット ／ 3点要確認</a:t>
+            </a:r>
+            <a:endParaRPr lang="en-US" sz="800" dirty="0"/>
           </a:p>
         </p:txBody>
       </p:sp>
@@ -2070,7 +2070,7 @@
               <a:buNone/>
             </a:pPr>
             <a:r>
-              <a:rPr lang="en-US" sz="1050" dirty="0">
+              <a:rPr lang="en-US" sz="1100" dirty="0">
                 <a:solidFill>
                   <a:srgbClr val="999999"/>
                 </a:solidFill>
@@ -2080,7 +2080,7 @@
               </a:rPr>
               <a:t>—</a:t>
             </a:r>
-            <a:endParaRPr lang="en-US" sz="1050" dirty="0"/>
+            <a:endParaRPr lang="en-US" sz="1100" dirty="0"/>
           </a:p>
         </p:txBody>
       </p:sp>
@@ -2109,7 +2109,7 @@
               <a:buNone/>
             </a:pPr>
             <a:r>
-              <a:rPr lang="en-US" sz="750" dirty="0">
+              <a:rPr lang="en-US" sz="800" dirty="0">
                 <a:solidFill>
                   <a:srgbClr val="999999"/>
                 </a:solidFill>
@@ -2117,9 +2117,9 @@
                 <a:ea typeface="Calibri" pitchFamily="34" charset="-122"/>
                 <a:cs typeface="Calibri" pitchFamily="34" charset="-120"/>
               </a:rPr>
-              <a:t>（一括購入）</a:t>
-            </a:r>
-            <a:endParaRPr lang="en-US" sz="750" dirty="0"/>
+              <a:t>一括購入</a:t>
+            </a:r>
+            <a:endParaRPr lang="en-US" sz="800" dirty="0"/>
           </a:p>
         </p:txBody>
       </p:sp>
@@ -2337,7 +2337,7 @@
               <a:buNone/>
             </a:pPr>
             <a:r>
-              <a:rPr lang="en-US" sz="1200" b="1" dirty="0">
+              <a:rPr lang="en-US" sz="1100" b="1" dirty="0">
                 <a:solidFill>
                   <a:srgbClr val="156818"/>
                 </a:solidFill>
@@ -2347,7 +2347,7 @@
               </a:rPr>
               <a:t>45,120 円</a:t>
             </a:r>
-            <a:endParaRPr lang="en-US" sz="1200" dirty="0"/>
+            <a:endParaRPr lang="en-US" sz="1100" dirty="0"/>
           </a:p>
         </p:txBody>
       </p:sp>
@@ -2376,7 +2376,7 @@
               <a:buNone/>
             </a:pPr>
             <a:r>
-              <a:rPr lang="en-US" sz="1200" b="1" dirty="0">
+              <a:rPr lang="en-US" sz="1100" b="1" dirty="0">
                 <a:solidFill>
                   <a:srgbClr val="156818"/>
                 </a:solidFill>
@@ -2386,7 +2386,7 @@
               </a:rPr>
               <a:t>59,520 円</a:t>
             </a:r>
-            <a:endParaRPr lang="en-US" sz="1200" dirty="0"/>
+            <a:endParaRPr lang="en-US" sz="1100" dirty="0"/>
           </a:p>
         </p:txBody>
       </p:sp>
@@ -2415,7 +2415,7 @@
               <a:buNone/>
             </a:pPr>
             <a:r>
-              <a:rPr lang="en-US" sz="1050" dirty="0">
+              <a:rPr lang="en-US" sz="1100" dirty="0">
                 <a:solidFill>
                   <a:srgbClr val="333333"/>
                 </a:solidFill>
@@ -2425,7 +2425,7 @@
               </a:rPr>
               <a:t>69,000 円</a:t>
             </a:r>
-            <a:endParaRPr lang="en-US" sz="1050" dirty="0"/>
+            <a:endParaRPr lang="en-US" sz="1100" dirty="0"/>
           </a:p>
         </p:txBody>
       </p:sp>
@@ -2454,7 +2454,7 @@
               <a:buNone/>
             </a:pPr>
             <a:r>
-              <a:rPr lang="en-US" sz="750" dirty="0">
+              <a:rPr lang="en-US" sz="800" dirty="0">
                 <a:solidFill>
                   <a:srgbClr val="999999"/>
                 </a:solidFill>
@@ -2462,9 +2462,9 @@
                 <a:ea typeface="Calibri" pitchFamily="34" charset="-122"/>
                 <a:cs typeface="Calibri" pitchFamily="34" charset="-120"/>
               </a:rPr>
-              <a:t>（新品・2年）※4年77,000円</a:t>
-            </a:r>
-            <a:endParaRPr lang="en-US" sz="750" dirty="0"/>
+              <a:t>新品 ※4年77,000円</a:t>
+            </a:r>
+            <a:endParaRPr lang="en-US" sz="800" dirty="0"/>
           </a:p>
         </p:txBody>
       </p:sp>
@@ -2493,7 +2493,7 @@
               <a:buNone/>
             </a:pPr>
             <a:r>
-              <a:rPr lang="en-US" sz="1050" dirty="0">
+              <a:rPr lang="en-US" sz="1100" dirty="0">
                 <a:solidFill>
                   <a:srgbClr val="999999"/>
                 </a:solidFill>
@@ -2503,7 +2503,7 @@
               </a:rPr>
               <a:t>要確認</a:t>
             </a:r>
-            <a:endParaRPr lang="en-US" sz="1050" dirty="0"/>
+            <a:endParaRPr lang="en-US" sz="1100" dirty="0"/>
           </a:p>
         </p:txBody>
       </p:sp>
@@ -2532,7 +2532,7 @@
               <a:buNone/>
             </a:pPr>
             <a:r>
-              <a:rPr lang="en-US" sz="750" dirty="0">
+              <a:rPr lang="en-US" sz="800" dirty="0">
                 <a:solidFill>
                   <a:srgbClr val="999999"/>
                 </a:solidFill>
@@ -2540,9 +2540,9 @@
                 <a:ea typeface="Calibri" pitchFamily="34" charset="-122"/>
                 <a:cs typeface="Calibri" pitchFamily="34" charset="-120"/>
               </a:rPr>
-              <a:t>（6点セット基準）</a:t>
-            </a:r>
-            <a:endParaRPr lang="en-US" sz="750" dirty="0"/>
+              <a:t>6点セット基準</a:t>
+            </a:r>
+            <a:endParaRPr lang="en-US" sz="800" dirty="0"/>
           </a:p>
         </p:txBody>
       </p:sp>
@@ -2571,7 +2571,7 @@
               <a:buNone/>
             </a:pPr>
             <a:r>
-              <a:rPr lang="en-US" sz="1050" dirty="0">
+              <a:rPr lang="en-US" sz="1100" dirty="0">
                 <a:solidFill>
                   <a:srgbClr val="333333"/>
                 </a:solidFill>
@@ -2579,9 +2579,9 @@
                 <a:ea typeface="Calibri" pitchFamily="34" charset="-122"/>
                 <a:cs typeface="Calibri" pitchFamily="34" charset="-120"/>
               </a:rPr>
-              <a:t>55,000〜80,000 円</a:t>
-            </a:r>
-            <a:endParaRPr lang="en-US" sz="1050" dirty="0"/>
+              <a:t>5.5〜8万円</a:t>
+            </a:r>
+            <a:endParaRPr lang="en-US" sz="1100" dirty="0"/>
           </a:p>
         </p:txBody>
       </p:sp>
@@ -2610,7 +2610,7 @@
               <a:buNone/>
             </a:pPr>
             <a:r>
-              <a:rPr lang="en-US" sz="750" dirty="0">
+              <a:rPr lang="en-US" sz="800" dirty="0">
                 <a:solidFill>
                   <a:srgbClr val="999999"/>
                 </a:solidFill>
@@ -2618,9 +2618,9 @@
                 <a:ea typeface="Calibri" pitchFamily="34" charset="-122"/>
                 <a:cs typeface="Calibri" pitchFamily="34" charset="-120"/>
               </a:rPr>
-              <a:t>（初期一括）</a:t>
-            </a:r>
-            <a:endParaRPr lang="en-US" sz="750" dirty="0"/>
+              <a:t>初期一括</a:t>
+            </a:r>
+            <a:endParaRPr lang="en-US" sz="800" dirty="0"/>
           </a:p>
         </p:txBody>
       </p:sp>
@@ -2838,7 +2838,7 @@
               <a:buNone/>
             </a:pPr>
             <a:r>
-              <a:rPr lang="en-US" sz="1200" b="1" dirty="0">
+              <a:rPr lang="en-US" sz="1100" b="1" dirty="0">
                 <a:solidFill>
                   <a:srgbClr val="156818"/>
                 </a:solidFill>
@@ -2848,7 +2848,7 @@
               </a:rPr>
               <a:t>0 円</a:t>
             </a:r>
-            <a:endParaRPr lang="en-US" sz="1200" dirty="0"/>
+            <a:endParaRPr lang="en-US" sz="1100" dirty="0"/>
           </a:p>
         </p:txBody>
       </p:sp>
@@ -2877,7 +2877,7 @@
               <a:buNone/>
             </a:pPr>
             <a:r>
-              <a:rPr lang="en-US" sz="1200" b="1" dirty="0">
+              <a:rPr lang="en-US" sz="1100" b="1" dirty="0">
                 <a:solidFill>
                   <a:srgbClr val="156818"/>
                 </a:solidFill>
@@ -2887,7 +2887,7 @@
               </a:rPr>
               <a:t>0 円</a:t>
             </a:r>
-            <a:endParaRPr lang="en-US" sz="1200" dirty="0"/>
+            <a:endParaRPr lang="en-US" sz="1100" dirty="0"/>
           </a:p>
         </p:txBody>
       </p:sp>
@@ -2916,7 +2916,7 @@
               <a:buNone/>
             </a:pPr>
             <a:r>
-              <a:rPr lang="en-US" sz="1050" dirty="0">
+              <a:rPr lang="en-US" sz="1100" dirty="0">
                 <a:solidFill>
                   <a:srgbClr val="333333"/>
                 </a:solidFill>
@@ -2926,7 +2926,7 @@
               </a:rPr>
               <a:t>0 円</a:t>
             </a:r>
-            <a:endParaRPr lang="en-US" sz="1050" dirty="0"/>
+            <a:endParaRPr lang="en-US" sz="1100" dirty="0"/>
           </a:p>
         </p:txBody>
       </p:sp>
@@ -2955,7 +2955,7 @@
               <a:buNone/>
             </a:pPr>
             <a:r>
-              <a:rPr lang="en-US" sz="1050" dirty="0">
+              <a:rPr lang="en-US" sz="1100" dirty="0">
                 <a:solidFill>
                   <a:srgbClr val="333333"/>
                 </a:solidFill>
@@ -2965,7 +2965,7 @@
               </a:rPr>
               <a:t>0 円</a:t>
             </a:r>
-            <a:endParaRPr lang="en-US" sz="1050" dirty="0"/>
+            <a:endParaRPr lang="en-US" sz="1100" dirty="0"/>
           </a:p>
         </p:txBody>
       </p:sp>
@@ -2994,7 +2994,7 @@
               <a:buNone/>
             </a:pPr>
             <a:r>
-              <a:rPr lang="en-US" sz="1050" dirty="0">
+              <a:rPr lang="en-US" sz="1100" dirty="0">
                 <a:solidFill>
                   <a:srgbClr val="E65100"/>
                 </a:solidFill>
@@ -3002,9 +3002,9 @@
                 <a:ea typeface="Calibri" pitchFamily="34" charset="-122"/>
                 <a:cs typeface="Calibri" pitchFamily="34" charset="-120"/>
               </a:rPr>
-              <a:t>55,000〜80,000 円</a:t>
-            </a:r>
-            <a:endParaRPr lang="en-US" sz="1050" dirty="0"/>
+              <a:t>5.5〜8万円</a:t>
+            </a:r>
+            <a:endParaRPr lang="en-US" sz="1100" dirty="0"/>
           </a:p>
         </p:txBody>
       </p:sp>
@@ -3222,7 +3222,7 @@
               <a:buNone/>
             </a:pPr>
             <a:r>
-              <a:rPr lang="en-US" sz="1200" b="1" dirty="0">
+              <a:rPr lang="en-US" sz="1100" b="1" dirty="0">
                 <a:solidFill>
                   <a:srgbClr val="156818"/>
                 </a:solidFill>
@@ -3232,7 +3232,7 @@
               </a:rPr>
               <a:t>無料</a:t>
             </a:r>
-            <a:endParaRPr lang="en-US" sz="1200" dirty="0"/>
+            <a:endParaRPr lang="en-US" sz="1100" dirty="0"/>
           </a:p>
         </p:txBody>
       </p:sp>
@@ -3261,7 +3261,7 @@
               <a:buNone/>
             </a:pPr>
             <a:r>
-              <a:rPr lang="en-US" sz="1200" b="1" dirty="0">
+              <a:rPr lang="en-US" sz="1100" b="1" dirty="0">
                 <a:solidFill>
                   <a:srgbClr val="156818"/>
                 </a:solidFill>
@@ -3271,7 +3271,7 @@
               </a:rPr>
               <a:t>無料</a:t>
             </a:r>
-            <a:endParaRPr lang="en-US" sz="1200" dirty="0"/>
+            <a:endParaRPr lang="en-US" sz="1100" dirty="0"/>
           </a:p>
         </p:txBody>
       </p:sp>
@@ -3300,7 +3300,7 @@
               <a:buNone/>
             </a:pPr>
             <a:r>
-              <a:rPr lang="en-US" sz="1050" dirty="0">
+              <a:rPr lang="en-US" sz="1100" dirty="0">
                 <a:solidFill>
                   <a:srgbClr val="333333"/>
                 </a:solidFill>
@@ -3310,7 +3310,7 @@
               </a:rPr>
               <a:t>無料</a:t>
             </a:r>
-            <a:endParaRPr lang="en-US" sz="1050" dirty="0"/>
+            <a:endParaRPr lang="en-US" sz="1100" dirty="0"/>
           </a:p>
         </p:txBody>
       </p:sp>
@@ -3339,7 +3339,7 @@
               <a:buNone/>
             </a:pPr>
             <a:r>
-              <a:rPr lang="en-US" sz="1050" dirty="0">
+              <a:rPr lang="en-US" sz="1100" dirty="0">
                 <a:solidFill>
                   <a:srgbClr val="333333"/>
                 </a:solidFill>
@@ -3349,7 +3349,7 @@
               </a:rPr>
               <a:t>無料</a:t>
             </a:r>
-            <a:endParaRPr lang="en-US" sz="1050" dirty="0"/>
+            <a:endParaRPr lang="en-US" sz="1100" dirty="0"/>
           </a:p>
         </p:txBody>
       </p:sp>
@@ -3378,7 +3378,7 @@
               <a:buNone/>
             </a:pPr>
             <a:r>
-              <a:rPr lang="en-US" sz="1050" dirty="0">
+              <a:rPr lang="en-US" sz="1100" dirty="0">
                 <a:solidFill>
                   <a:srgbClr val="E65100"/>
                 </a:solidFill>
@@ -3388,7 +3388,7 @@
               </a:rPr>
               <a:t>有料</a:t>
             </a:r>
-            <a:endParaRPr lang="en-US" sz="1050" dirty="0"/>
+            <a:endParaRPr lang="en-US" sz="1100" dirty="0"/>
           </a:p>
         </p:txBody>
       </p:sp>
@@ -3417,7 +3417,7 @@
               <a:buNone/>
             </a:pPr>
             <a:r>
-              <a:rPr lang="en-US" sz="750" dirty="0">
+              <a:rPr lang="en-US" sz="800" dirty="0">
                 <a:solidFill>
                   <a:srgbClr val="999999"/>
                 </a:solidFill>
@@ -3427,7 +3427,7 @@
               </a:rPr>
               <a:t>（別途）</a:t>
             </a:r>
-            <a:endParaRPr lang="en-US" sz="750" dirty="0"/>
+            <a:endParaRPr lang="en-US" sz="800" dirty="0"/>
           </a:p>
         </p:txBody>
       </p:sp>
@@ -3645,7 +3645,7 @@
               <a:buNone/>
             </a:pPr>
             <a:r>
-              <a:rPr lang="en-US" sz="1200" b="1" dirty="0">
+              <a:rPr lang="en-US" sz="1100" b="1" dirty="0">
                 <a:solidFill>
                   <a:srgbClr val="156818"/>
                 </a:solidFill>
@@ -3655,7 +3655,7 @@
               </a:rPr>
               <a:t>無料</a:t>
             </a:r>
-            <a:endParaRPr lang="en-US" sz="1200" dirty="0"/>
+            <a:endParaRPr lang="en-US" sz="1100" dirty="0"/>
           </a:p>
         </p:txBody>
       </p:sp>
@@ -3684,7 +3684,7 @@
               <a:buNone/>
             </a:pPr>
             <a:r>
-              <a:rPr lang="en-US" sz="1200" b="1" dirty="0">
+              <a:rPr lang="en-US" sz="1100" b="1" dirty="0">
                 <a:solidFill>
                   <a:srgbClr val="156818"/>
                 </a:solidFill>
@@ -3694,7 +3694,7 @@
               </a:rPr>
               <a:t>無料</a:t>
             </a:r>
-            <a:endParaRPr lang="en-US" sz="1200" dirty="0"/>
+            <a:endParaRPr lang="en-US" sz="1100" dirty="0"/>
           </a:p>
         </p:txBody>
       </p:sp>
@@ -3723,7 +3723,7 @@
               <a:buNone/>
             </a:pPr>
             <a:r>
-              <a:rPr lang="en-US" sz="1050" dirty="0">
+              <a:rPr lang="en-US" sz="1100" dirty="0">
                 <a:solidFill>
                   <a:srgbClr val="333333"/>
                 </a:solidFill>
@@ -3733,7 +3733,7 @@
               </a:rPr>
               <a:t>無料</a:t>
             </a:r>
-            <a:endParaRPr lang="en-US" sz="1050" dirty="0"/>
+            <a:endParaRPr lang="en-US" sz="1100" dirty="0"/>
           </a:p>
         </p:txBody>
       </p:sp>
@@ -3762,7 +3762,7 @@
               <a:buNone/>
             </a:pPr>
             <a:r>
-              <a:rPr lang="en-US" sz="1050" dirty="0">
+              <a:rPr lang="en-US" sz="1100" dirty="0">
                 <a:solidFill>
                   <a:srgbClr val="333333"/>
                 </a:solidFill>
@@ -3772,7 +3772,7 @@
               </a:rPr>
               <a:t>無料</a:t>
             </a:r>
-            <a:endParaRPr lang="en-US" sz="1050" dirty="0"/>
+            <a:endParaRPr lang="en-US" sz="1100" dirty="0"/>
           </a:p>
         </p:txBody>
       </p:sp>
@@ -3801,7 +3801,7 @@
               <a:buNone/>
             </a:pPr>
             <a:r>
-              <a:rPr lang="en-US" sz="1050" dirty="0">
+              <a:rPr lang="en-US" sz="1100" dirty="0">
                 <a:solidFill>
                   <a:srgbClr val="E65100"/>
                 </a:solidFill>
@@ -3811,7 +3811,7 @@
               </a:rPr>
               <a:t>廃棄費用</a:t>
             </a:r>
-            <a:endParaRPr lang="en-US" sz="1050" dirty="0"/>
+            <a:endParaRPr lang="en-US" sz="1100" dirty="0"/>
           </a:p>
         </p:txBody>
       </p:sp>
@@ -3840,7 +3840,7 @@
               <a:buNone/>
             </a:pPr>
             <a:r>
-              <a:rPr lang="en-US" sz="750" dirty="0">
+              <a:rPr lang="en-US" sz="800" dirty="0">
                 <a:solidFill>
                   <a:srgbClr val="999999"/>
                 </a:solidFill>
@@ -3850,7 +3850,7 @@
               </a:rPr>
               <a:t>（自己負担）</a:t>
             </a:r>
-            <a:endParaRPr lang="en-US" sz="750" dirty="0"/>
+            <a:endParaRPr lang="en-US" sz="800" dirty="0"/>
           </a:p>
         </p:txBody>
       </p:sp>
@@ -4068,7 +4068,7 @@
               <a:buNone/>
             </a:pPr>
             <a:r>
-              <a:rPr lang="en-US" sz="1200" b="1" dirty="0">
+              <a:rPr lang="en-US" sz="1100" b="1" dirty="0">
                 <a:solidFill>
                   <a:srgbClr val="156818"/>
                 </a:solidFill>
@@ -4078,7 +4078,7 @@
               </a:rPr>
               <a:t>新規受付中</a:t>
             </a:r>
-            <a:endParaRPr lang="en-US" sz="1200" dirty="0"/>
+            <a:endParaRPr lang="en-US" sz="1100" dirty="0"/>
           </a:p>
         </p:txBody>
       </p:sp>
@@ -4107,7 +4107,7 @@
               <a:buNone/>
             </a:pPr>
             <a:r>
-              <a:rPr lang="en-US" sz="750" dirty="0">
+              <a:rPr lang="en-US" sz="800" dirty="0">
                 <a:solidFill>
                   <a:srgbClr val="999999"/>
                 </a:solidFill>
@@ -4117,7 +4117,7 @@
               </a:rPr>
               <a:t>（独占提携可）</a:t>
             </a:r>
-            <a:endParaRPr lang="en-US" sz="750" dirty="0"/>
+            <a:endParaRPr lang="en-US" sz="800" dirty="0"/>
           </a:p>
         </p:txBody>
       </p:sp>
@@ -4146,7 +4146,7 @@
               <a:buNone/>
             </a:pPr>
             <a:r>
-              <a:rPr lang="en-US" sz="1200" b="1" dirty="0">
+              <a:rPr lang="en-US" sz="1100" b="1" dirty="0">
                 <a:solidFill>
                   <a:srgbClr val="156818"/>
                 </a:solidFill>
@@ -4156,7 +4156,7 @@
               </a:rPr>
               <a:t>新規受付中</a:t>
             </a:r>
-            <a:endParaRPr lang="en-US" sz="1200" dirty="0"/>
+            <a:endParaRPr lang="en-US" sz="1100" dirty="0"/>
           </a:p>
         </p:txBody>
       </p:sp>
@@ -4185,7 +4185,7 @@
               <a:buNone/>
             </a:pPr>
             <a:r>
-              <a:rPr lang="en-US" sz="750" dirty="0">
+              <a:rPr lang="en-US" sz="800" dirty="0">
                 <a:solidFill>
                   <a:srgbClr val="999999"/>
                 </a:solidFill>
@@ -4195,7 +4195,7 @@
               </a:rPr>
               <a:t>（独占提携可）</a:t>
             </a:r>
-            <a:endParaRPr lang="en-US" sz="750" dirty="0"/>
+            <a:endParaRPr lang="en-US" sz="800" dirty="0"/>
           </a:p>
         </p:txBody>
       </p:sp>
@@ -4224,7 +4224,7 @@
               <a:buNone/>
             </a:pPr>
             <a:r>
-              <a:rPr lang="en-US" sz="1050" dirty="0">
+              <a:rPr lang="en-US" sz="1100" dirty="0">
                 <a:solidFill>
                   <a:srgbClr val="E65100"/>
                 </a:solidFill>
@@ -4234,7 +4234,7 @@
               </a:rPr>
               <a:t>大規模校中心</a:t>
             </a:r>
-            <a:endParaRPr lang="en-US" sz="1050" dirty="0"/>
+            <a:endParaRPr lang="en-US" sz="1100" dirty="0"/>
           </a:p>
         </p:txBody>
       </p:sp>
@@ -4263,7 +4263,7 @@
               <a:buNone/>
             </a:pPr>
             <a:r>
-              <a:rPr lang="en-US" sz="750" dirty="0">
+              <a:rPr lang="en-US" sz="800" dirty="0">
                 <a:solidFill>
                   <a:srgbClr val="999999"/>
                 </a:solidFill>
@@ -4273,7 +4273,7 @@
               </a:rPr>
               <a:t>（競合多い）</a:t>
             </a:r>
-            <a:endParaRPr lang="en-US" sz="750" dirty="0"/>
+            <a:endParaRPr lang="en-US" sz="800" dirty="0"/>
           </a:p>
         </p:txBody>
       </p:sp>
@@ -4302,7 +4302,7 @@
               <a:buNone/>
             </a:pPr>
             <a:r>
-              <a:rPr lang="en-US" sz="1050" dirty="0">
+              <a:rPr lang="en-US" sz="1100" dirty="0">
                 <a:solidFill>
                   <a:srgbClr val="E65100"/>
                 </a:solidFill>
@@ -4312,7 +4312,7 @@
               </a:rPr>
               <a:t>大規模校中心</a:t>
             </a:r>
-            <a:endParaRPr lang="en-US" sz="1050" dirty="0"/>
+            <a:endParaRPr lang="en-US" sz="1100" dirty="0"/>
           </a:p>
         </p:txBody>
       </p:sp>
@@ -4341,7 +4341,7 @@
               <a:buNone/>
             </a:pPr>
             <a:r>
-              <a:rPr lang="en-US" sz="750" dirty="0">
+              <a:rPr lang="en-US" sz="800" dirty="0">
                 <a:solidFill>
                   <a:srgbClr val="999999"/>
                 </a:solidFill>
@@ -4351,7 +4351,7 @@
               </a:rPr>
               <a:t>（競合多い）</a:t>
             </a:r>
-            <a:endParaRPr lang="en-US" sz="750" dirty="0"/>
+            <a:endParaRPr lang="en-US" sz="800" dirty="0"/>
           </a:p>
         </p:txBody>
       </p:sp>
@@ -4380,7 +4380,7 @@
               <a:buNone/>
             </a:pPr>
             <a:r>
-              <a:rPr lang="en-US" sz="1050" dirty="0">
+              <a:rPr lang="en-US" sz="1100" dirty="0">
                 <a:solidFill>
                   <a:srgbClr val="999999"/>
                 </a:solidFill>
@@ -4390,7 +4390,7 @@
               </a:rPr>
               <a:t>—</a:t>
             </a:r>
-            <a:endParaRPr lang="en-US" sz="1050" dirty="0"/>
+            <a:endParaRPr lang="en-US" sz="1100" dirty="0"/>
           </a:p>
         </p:txBody>
       </p:sp>

--- a/料金比較表_v1.pptx
+++ b/料金比較表_v1.pptx
@@ -1152,17 +1152,14 @@
           <a:ln/>
         </p:spPr>
         <p:txBody>
-          <a:bodyPr wrap="square" rtlCol="0" anchor="ctr"/>
-          <a:lstStyle/>
-          <a:p>
-            <a:pPr algn="ctr" indent="0" marL="0">
-              <a:lnSpc>
-                <a:spcPct val="120000"/>
-              </a:lnSpc>
-              <a:buNone/>
-            </a:pPr>
-            <a:r>
-              <a:rPr lang="en-US" sz="1000" dirty="0">
+          <a:bodyPr wrap="square" lIns="0" tIns="0" rIns="0" bIns="0" rtlCol="0" anchor="ctr"/>
+          <a:lstStyle/>
+          <a:p>
+            <a:pPr algn="ctr" indent="0" marL="0">
+              <a:buNone/>
+            </a:pPr>
+            <a:r>
+              <a:rPr lang="en-US" sz="1000" b="1" dirty="0">
                 <a:solidFill>
                   <a:srgbClr val="FFFFFF"/>
                 </a:solidFill>
@@ -1171,26 +1168,6 @@
                 <a:cs typeface="Calibri" pitchFamily="34" charset="-120"/>
               </a:rPr>
               <a:t>中古（リユース）</a:t>
-            </a:r>
-            <a:endParaRPr lang="en-US" sz="1000" dirty="0"/>
-          </a:p>
-          <a:p>
-            <a:pPr algn="ctr" indent="0" marL="0">
-              <a:lnSpc>
-                <a:spcPct val="120000"/>
-              </a:lnSpc>
-              <a:buNone/>
-            </a:pPr>
-            <a:r>
-              <a:rPr lang="en-US" sz="1000" b="1" dirty="0">
-                <a:solidFill>
-                  <a:srgbClr val="FFFFFF"/>
-                </a:solidFill>
-                <a:latin typeface="Calibri" pitchFamily="34" charset="0"/>
-                <a:ea typeface="Calibri" pitchFamily="34" charset="-122"/>
-                <a:cs typeface="Calibri" pitchFamily="34" charset="-120"/>
-              </a:rPr>
-              <a:t>月額 1,880円</a:t>
             </a:r>
             <a:endParaRPr lang="en-US" sz="1000" dirty="0"/>
           </a:p>
@@ -1239,17 +1216,14 @@
           <a:ln/>
         </p:spPr>
         <p:txBody>
-          <a:bodyPr wrap="square" rtlCol="0" anchor="ctr"/>
-          <a:lstStyle/>
-          <a:p>
-            <a:pPr algn="ctr" indent="0" marL="0">
-              <a:lnSpc>
-                <a:spcPct val="120000"/>
-              </a:lnSpc>
-              <a:buNone/>
-            </a:pPr>
-            <a:r>
-              <a:rPr lang="en-US" sz="1000" dirty="0">
+          <a:bodyPr wrap="square" lIns="0" tIns="0" rIns="0" bIns="0" rtlCol="0" anchor="ctr"/>
+          <a:lstStyle/>
+          <a:p>
+            <a:pPr algn="ctr" indent="0" marL="0">
+              <a:buNone/>
+            </a:pPr>
+            <a:r>
+              <a:rPr lang="en-US" sz="1000" b="1" dirty="0">
                 <a:solidFill>
                   <a:srgbClr val="FFFFFF"/>
                 </a:solidFill>
@@ -1258,26 +1232,6 @@
                 <a:cs typeface="Calibri" pitchFamily="34" charset="-120"/>
               </a:rPr>
               <a:t>新品</a:t>
-            </a:r>
-            <a:endParaRPr lang="en-US" sz="1000" dirty="0"/>
-          </a:p>
-          <a:p>
-            <a:pPr algn="ctr" indent="0" marL="0">
-              <a:lnSpc>
-                <a:spcPct val="120000"/>
-              </a:lnSpc>
-              <a:buNone/>
-            </a:pPr>
-            <a:r>
-              <a:rPr lang="en-US" sz="1000" b="1" dirty="0">
-                <a:solidFill>
-                  <a:srgbClr val="FFFFFF"/>
-                </a:solidFill>
-                <a:latin typeface="Calibri" pitchFamily="34" charset="0"/>
-                <a:ea typeface="Calibri" pitchFamily="34" charset="-122"/>
-                <a:cs typeface="Calibri" pitchFamily="34" charset="-120"/>
-              </a:rPr>
-              <a:t>月額 2,480円</a:t>
             </a:r>
             <a:endParaRPr lang="en-US" sz="1000" dirty="0"/>
           </a:p>
